--- a/curso/pptx/S78.pptx
+++ b/curso/pptx/S78.pptx
@@ -7052,7 +7052,7 @@
                 </a:solidFill>
                 <a:latin typeface="Nunito Sans"/>
               </a:rPr>
-              <a:t>Es </a:t>
+              <a:t>它是</a:t>
             </a:r>
             <a:r>
               <a:rPr sz="2800" b="1">
@@ -7061,7 +7061,7 @@
                 </a:solidFill>
                 <a:latin typeface="Nunito Sans"/>
               </a:rPr>
-              <a:t>mutua</a:t>
+              <a:t>相互的</a:t>
             </a:r>
             <a:r>
               <a:rPr sz="2800" b="0">
@@ -7070,7 +7070,7 @@
                 </a:solidFill>
                 <a:latin typeface="Nunito Sans"/>
               </a:rPr>
-              <a:t>: si solo quiere uno, no es amistad</a:t>
+              <a:t>：只有一方这样想，就不是友谊</a:t>
             </a:r>
           </a:p>
           <a:p>
@@ -7095,7 +7095,7 @@
                 </a:solidFill>
                 <a:latin typeface="Nunito Sans"/>
               </a:rPr>
-              <a:t>Los dos lo </a:t>
+              <a:t>两个人都</a:t>
             </a:r>
             <a:r>
               <a:rPr sz="2800" b="1">
@@ -7104,7 +7104,7 @@
                 </a:solidFill>
                 <a:latin typeface="Nunito Sans"/>
               </a:rPr>
-              <a:t>saben</a:t>
+              <a:t>知道</a:t>
             </a:r>
             <a:r>
               <a:rPr sz="2800" b="0">
@@ -7113,7 +7113,7 @@
                 </a:solidFill>
                 <a:latin typeface="Nunito Sans"/>
               </a:rPr>
-              <a:t>: no es un cariño escondido</a:t>
+              <a:t>：不是藏在心里的感情</a:t>
             </a:r>
           </a:p>
           <a:p>
@@ -7138,7 +7138,7 @@
                 </a:solidFill>
                 <a:latin typeface="Nunito Sans"/>
               </a:rPr>
-              <a:t>Aristóteles fue un filósofo griego, alumno de Platón</a:t>
+              <a:t>亚里士多德是古希腊哲学家，柏拉图的学生</a:t>
             </a:r>
           </a:p>
         </p:txBody>
@@ -7729,7 +7729,7 @@
                 </a:solidFill>
                 <a:latin typeface="Nunito Sans"/>
               </a:rPr>
-              <a:t>Las amistades por utilidad y por placer </a:t>
+              <a:t>基于利益和基于快乐的友谊</a:t>
             </a:r>
             <a:r>
               <a:rPr sz="2800" b="1">
@@ -7738,7 +7738,7 @@
                 </a:solidFill>
                 <a:latin typeface="Nunito Sans"/>
               </a:rPr>
-              <a:t>no son falsas</a:t>
+              <a:t>并不是假的</a:t>
             </a:r>
             <a:r>
               <a:rPr sz="2800" b="0">
@@ -7747,7 +7747,7 @@
                 </a:solidFill>
                 <a:latin typeface="Nunito Sans"/>
               </a:rPr>
-              <a:t>: son más frágiles</a:t>
+              <a:t>：只是更脆弱</a:t>
             </a:r>
           </a:p>
           <a:p>
@@ -7772,7 +7772,7 @@
                 </a:solidFill>
                 <a:latin typeface="Nunito Sans"/>
               </a:rPr>
-              <a:t>Según él, los jóvenes suelen hacer amistades por </a:t>
+              <a:t>他认为，年轻人常常因为</a:t>
             </a:r>
             <a:r>
               <a:rPr sz="2800" b="1">
@@ -7781,7 +7781,7 @@
                 </a:solidFill>
                 <a:latin typeface="Nunito Sans"/>
               </a:rPr>
-              <a:t>placer</a:t>
+              <a:t>快乐</a:t>
             </a:r>
             <a:r>
               <a:rPr sz="2800" b="0">
@@ -7790,7 +7790,7 @@
                 </a:solidFill>
                 <a:latin typeface="Nunito Sans"/>
               </a:rPr>
-              <a:t>, y cambian a menudo</a:t>
+              <a:t>而交朋友，而且常常换朋友</a:t>
             </a:r>
           </a:p>
           <a:p>
@@ -7815,7 +7815,7 @@
                 </a:solidFill>
                 <a:latin typeface="Nunito Sans"/>
               </a:rPr>
-              <a:t>La amistad por </a:t>
+              <a:t>基于</a:t>
             </a:r>
             <a:r>
               <a:rPr sz="2800" b="1">
@@ -7824,7 +7824,7 @@
                 </a:solidFill>
                 <a:latin typeface="Nunito Sans"/>
               </a:rPr>
-              <a:t>virtud</a:t>
+              <a:t>美德</a:t>
             </a:r>
             <a:r>
               <a:rPr sz="2800" b="0">
@@ -7833,7 +7833,7 @@
                 </a:solidFill>
                 <a:latin typeface="Nunito Sans"/>
               </a:rPr>
-              <a:t> también es útil y agradable, pero no depende de eso</a:t>
+              <a:t>的友谊同样有用、令人愉快，但并不依赖这些</a:t>
             </a:r>
           </a:p>
           <a:p>
@@ -7858,7 +7858,7 @@
                 </a:solidFill>
                 <a:latin typeface="Nunito Sans"/>
               </a:rPr>
-              <a:t>Necesita </a:t>
+              <a:t>需要</a:t>
             </a:r>
             <a:r>
               <a:rPr sz="2800" b="1">
@@ -7867,7 +7867,7 @@
                 </a:solidFill>
                 <a:latin typeface="Nunito Sans"/>
               </a:rPr>
-              <a:t>tiempo</a:t>
+              <a:t>时间</a:t>
             </a:r>
             <a:r>
               <a:rPr sz="2800" b="0">
@@ -7876,7 +7876,7 @@
                 </a:solidFill>
                 <a:latin typeface="Nunito Sans"/>
               </a:rPr>
-              <a:t> y trato: no se hace en una semana</a:t>
+              <a:t>和交往：一个星期是建不起来的</a:t>
             </a:r>
           </a:p>
         </p:txBody>

--- a/curso/pptx/S78.pptx
+++ b/curso/pptx/S78.pptx
@@ -4150,7 +4150,7 @@
                 </a:solidFill>
                 <a:latin typeface="Fredoka"/>
               </a:rPr>
-              <a:t>案例1 · 陈的三个朋友</a:t>
+              <a:t>案例1 · 一个男孩的三个朋友</a:t>
             </a:r>
           </a:p>
         </p:txBody>
@@ -4232,7 +4232,7 @@
                 </a:solidFill>
                 <a:latin typeface="Nunito Sans"/>
               </a:rPr>
-              <a:t>陈和 Dylan 坐在一起，因为 Dylan 把笔记借给他。他和 Omar 一起玩 Fortnite。他和 Naiara 从小学起什么都聊。（虚构的例子。）</a:t>
+              <a:t>一个男孩和一个同学坐在一起，因为这个同学把笔记借给他。他和另一个同学一起玩 Fortnite。他和一个女同学从小学起什么都聊。（虚构的例子。）</a:t>
             </a:r>
           </a:p>
         </p:txBody>
@@ -4280,7 +4280,7 @@
                 </a:solidFill>
                 <a:latin typeface="Nunito Sans"/>
               </a:rPr>
-              <a:t>Dylan：对他有用，因为有笔记。这是基于</a:t>
+              <a:t>这个同学：对他有用，因为有笔记。这是基于</a:t>
             </a:r>
             <a:r>
               <a:rPr sz="2400" b="1">
@@ -4323,7 +4323,7 @@
                 </a:solidFill>
                 <a:latin typeface="Nunito Sans"/>
               </a:rPr>
-              <a:t>Omar：他们一起玩得开心。这是基于</a:t>
+              <a:t>另一个同学：他们一起玩得开心。这是基于</a:t>
             </a:r>
             <a:r>
               <a:rPr sz="2400" b="1">
@@ -4366,7 +4366,7 @@
                 </a:solidFill>
                 <a:latin typeface="Nunito Sans"/>
               </a:rPr>
-              <a:t>Naiara：他们喜欢对方本来的样子，已经很多年了。这很像基于</a:t>
+              <a:t>一个女同学：他们喜欢对方本来的样子，已经很多年了。这很像基于</a:t>
             </a:r>
             <a:r>
               <a:rPr sz="2400" b="1">
@@ -4595,7 +4595,7 @@
                 </a:solidFill>
                 <a:latin typeface="Nunito Sans"/>
               </a:rPr>
-              <a:t>在 WhatsApp 群里，Leire 的小圈子在嘲笑一个新来的女生。Leire 不想笑，但她想：“如果我不笑，他们就会把我排除在外。”（虚构的例子。）</a:t>
+              <a:t>在 WhatsApp 群里，一个女孩的小圈子在嘲笑一个新来的女生。这个女孩不想笑，但她想：“如果我不笑，他们就会把我排除在外。”（虚构的例子。）</a:t>
             </a:r>
           </a:p>
         </p:txBody>
@@ -4940,7 +4940,7 @@
                 </a:solidFill>
                 <a:latin typeface="Nunito Sans"/>
               </a:rPr>
-              <a:t>Iker 想让 Aitor 对他妈妈说，昨天他们一起学习了。其实 Iker 去了老城区。“如果你是我的朋友，你就会帮我打掩护。”（虚构的例子。）</a:t>
+              <a:t>一个男孩想让一个同学对他妈妈说，昨天他们一起学习了。其实这个男孩去了老城区。“如果你是我的朋友，你就会帮我打掩护。”（虚构的例子。）</a:t>
             </a:r>
           </a:p>
         </p:txBody>
@@ -4988,7 +4988,7 @@
                 </a:solidFill>
                 <a:latin typeface="Nunito Sans"/>
               </a:rPr>
-              <a:t>如果 Aitor 说不，他是坏朋友吗？</a:t>
+              <a:t>如果这个同学说不，他是坏朋友吗？</a:t>
             </a:r>
           </a:p>
           <a:p>
@@ -6514,7 +6514,7 @@
                 </a:solidFill>
                 <a:latin typeface="Nunito Sans"/>
               </a:rPr>
-              <a:t>Iker 在 Instagram 上有600个粉丝，还有一个30个同伴的 WhatsApp 群。</a:t>
+              <a:t>一个男孩在 Instagram 上有600个粉丝，还有一个30个同伴的 WhatsApp 群。</a:t>
             </a:r>
           </a:p>
         </p:txBody>
